--- a/Desafio 2 - Projeto - 11062025/Projeto Final - Artefatos/I2A2_Agentes_Inteligentes_Projeto_Final_Grupo1.pptx
+++ b/Desafio 2 - Projeto - 11062025/Projeto Final - Artefatos/I2A2_Agentes_Inteligentes_Projeto_Final_Grupo1.pptx
@@ -274,8 +274,11 @@
     </a:lvl9pPr>
   </p:defaultTextStyle>
   <p:extLst>
+    <p:ext uri="{EFAFB233-063F-42B5-8137-9DF3F51BA10A}">
+      <p15:sldGuideLst xmlns:p15="http://schemas.microsoft.com/office/powerpoint/2012/main"/>
+    </p:ext>
     <p:ext uri="GoogleSlidesCustomDataVersion2">
-      <go:slidesCustomData xmlns:go="http://customooxmlschemas.google.com/" xmlns:ahyp="http://schemas.microsoft.com/office/drawing/2018/hyperlinkcolor" xmlns:p15="http://schemas.microsoft.com/office/powerpoint/2012/main" xmlns:p14="http://schemas.microsoft.com/office/powerpoint/2010/main" xmlns:com="http://schemas.openxmlformats.org/drawingml/2006/compatibility" xmlns:pvml="urn:schemas-microsoft-com:office:powerpoint" xmlns:v="urn:schemas-microsoft-com:vml" xmlns:o="urn:schemas-microsoft-com:office:office" xmlns:dgm="http://schemas.openxmlformats.org/drawingml/2006/diagram" xmlns:c="http://schemas.openxmlformats.org/drawingml/2006/chart" xmlns:mv="urn:schemas-microsoft-com:mac:vml" xmlns:mc="http://schemas.openxmlformats.org/markup-compatibility/2006" xmlns="" r:id="rId25" roundtripDataSignature="AMtx7mh5HV7jsEe0+dscwCawAtKCTcPn5w=="/>
+      <go:slidesCustomData xmlns="" xmlns:mc="http://schemas.openxmlformats.org/markup-compatibility/2006" xmlns:mv="urn:schemas-microsoft-com:mac:vml" xmlns:c="http://schemas.openxmlformats.org/drawingml/2006/chart" xmlns:dgm="http://schemas.openxmlformats.org/drawingml/2006/diagram" xmlns:o="urn:schemas-microsoft-com:office:office" xmlns:v="urn:schemas-microsoft-com:vml" xmlns:pvml="urn:schemas-microsoft-com:office:powerpoint" xmlns:com="http://schemas.openxmlformats.org/drawingml/2006/compatibility" xmlns:p14="http://schemas.microsoft.com/office/powerpoint/2010/main" xmlns:p15="http://schemas.microsoft.com/office/powerpoint/2012/main" xmlns:ahyp="http://schemas.microsoft.com/office/drawing/2018/hyperlinkcolor" xmlns:go="http://customooxmlschemas.google.com/" r:id="rId25" roundtripDataSignature="AMtx7mh5HV7jsEe0+dscwCawAtKCTcPn5w=="/>
     </p:ext>
   </p:extLst>
 </p:presentation>
@@ -16508,7 +16511,7 @@
         </p:nvSpPr>
         <p:spPr>
           <a:xfrm>
-            <a:off x="129943" y="1378146"/>
+            <a:off x="1677667" y="945335"/>
             <a:ext cx="1098568" cy="519373"/>
           </a:xfrm>
           <a:prstGeom prst="rect">
@@ -16543,7 +16546,7 @@
               <a:buNone/>
             </a:pPr>
             <a:r>
-              <a:rPr lang="en-US" sz="1125" b="0" i="0" u="none" strike="noStrike" cap="none">
+              <a:rPr lang="en-US" sz="1125" b="0" i="0" u="none" strike="noStrike" cap="none" dirty="0" err="1">
                 <a:solidFill>
                   <a:srgbClr val="1A365D"/>
                 </a:solidFill>
@@ -16552,10 +16555,22 @@
                 <a:cs typeface="Montserrat"/>
                 <a:sym typeface="Montserrat"/>
               </a:rPr>
-              <a:t>Exemplo:</a:t>
+              <a:t>Exemplo</a:t>
+            </a:r>
+            <a:r>
+              <a:rPr lang="en-US" sz="1125" b="0" i="0" u="none" strike="noStrike" cap="none" dirty="0">
+                <a:solidFill>
+                  <a:srgbClr val="1A365D"/>
+                </a:solidFill>
+                <a:latin typeface="Montserrat"/>
+                <a:ea typeface="Montserrat"/>
+                <a:cs typeface="Montserrat"/>
+                <a:sym typeface="Montserrat"/>
+              </a:rPr>
+              <a:t>:</a:t>
             </a:r>
             <a:br>
-              <a:rPr lang="en-US" sz="1125" b="0" i="0" u="none" strike="noStrike" cap="none">
+              <a:rPr lang="en-US" sz="1125" b="0" i="0" u="none" strike="noStrike" cap="none" dirty="0">
                 <a:solidFill>
                   <a:srgbClr val="1A365D"/>
                 </a:solidFill>
@@ -16566,7 +16581,7 @@
               </a:rPr>
             </a:br>
             <a:r>
-              <a:rPr lang="en-US" sz="1125" b="1" i="0" u="none" strike="noStrike" cap="none">
+              <a:rPr lang="en-US" sz="1125" b="1" i="0" u="none" strike="noStrike" cap="none" dirty="0">
                 <a:solidFill>
                   <a:srgbClr val="1A365D"/>
                 </a:solidFill>
@@ -16575,64 +16590,10 @@
                 <a:cs typeface="Montserrat"/>
                 <a:sym typeface="Montserrat"/>
               </a:rPr>
-              <a:t>carga de NF-e em PDF</a:t>
+              <a:t>carga de NF-e </a:t>
             </a:r>
-            <a:endParaRPr sz="1125" b="0" i="0" u="none" strike="noStrike" cap="none">
-              <a:solidFill>
-                <a:schemeClr val="dk1"/>
-              </a:solidFill>
-              <a:latin typeface="Calibri"/>
-              <a:ea typeface="Calibri"/>
-              <a:cs typeface="Calibri"/>
-              <a:sym typeface="Calibri"/>
-            </a:endParaRPr>
-          </a:p>
-        </p:txBody>
-      </p:sp>
-      <p:sp>
-        <p:nvSpPr>
-          <p:cNvPr id="269" name="Google Shape;269;p10"/>
-          <p:cNvSpPr/>
-          <p:nvPr/>
-        </p:nvSpPr>
-        <p:spPr>
-          <a:xfrm>
-            <a:off x="7693014" y="1378146"/>
-            <a:ext cx="1186695" cy="519373"/>
-          </a:xfrm>
-          <a:prstGeom prst="rect">
-            <a:avLst/>
-          </a:prstGeom>
-          <a:noFill/>
-          <a:ln>
-            <a:noFill/>
-          </a:ln>
-        </p:spPr>
-        <p:txBody>
-          <a:bodyPr spcFirstLastPara="1" wrap="square" lIns="0" tIns="0" rIns="0" bIns="0" anchor="ctr" anchorCtr="0">
-            <a:spAutoFit/>
-          </a:bodyPr>
-          <a:lstStyle/>
-          <a:p>
-            <a:pPr marL="0" marR="0" lvl="0" indent="0" algn="l" rtl="0">
-              <a:lnSpc>
-                <a:spcPct val="100000"/>
-              </a:lnSpc>
-              <a:spcBef>
-                <a:spcPts val="0"/>
-              </a:spcBef>
-              <a:spcAft>
-                <a:spcPts val="0"/>
-              </a:spcAft>
-              <a:buClr>
-                <a:srgbClr val="1A365D"/>
-              </a:buClr>
-              <a:buSzPts val="1125"/>
-              <a:buFont typeface="Montserrat"/>
-              <a:buNone/>
-            </a:pPr>
             <a:r>
-              <a:rPr lang="en-US" sz="1125" b="0" i="0" u="none" strike="noStrike" cap="none">
+              <a:rPr lang="en-US" sz="1125" b="1" i="0" u="none" strike="noStrike" cap="none" dirty="0" err="1">
                 <a:solidFill>
                   <a:srgbClr val="1A365D"/>
                 </a:solidFill>
@@ -16641,10 +16602,100 @@
                 <a:cs typeface="Montserrat"/>
                 <a:sym typeface="Montserrat"/>
               </a:rPr>
-              <a:t>Exemplo:</a:t>
+              <a:t>em</a:t>
+            </a:r>
+            <a:r>
+              <a:rPr lang="en-US" sz="1125" b="1" i="0" u="none" strike="noStrike" cap="none" dirty="0">
+                <a:solidFill>
+                  <a:srgbClr val="1A365D"/>
+                </a:solidFill>
+                <a:latin typeface="Montserrat"/>
+                <a:ea typeface="Montserrat"/>
+                <a:cs typeface="Montserrat"/>
+                <a:sym typeface="Montserrat"/>
+              </a:rPr>
+              <a:t> XML</a:t>
+            </a:r>
+            <a:endParaRPr sz="1125" b="0" i="0" u="none" strike="noStrike" cap="none" dirty="0">
+              <a:solidFill>
+                <a:schemeClr val="dk1"/>
+              </a:solidFill>
+              <a:latin typeface="Calibri"/>
+              <a:ea typeface="Calibri"/>
+              <a:cs typeface="Calibri"/>
+              <a:sym typeface="Calibri"/>
+            </a:endParaRPr>
+          </a:p>
+        </p:txBody>
+      </p:sp>
+      <p:sp>
+        <p:nvSpPr>
+          <p:cNvPr id="269" name="Google Shape;269;p10"/>
+          <p:cNvSpPr/>
+          <p:nvPr/>
+        </p:nvSpPr>
+        <p:spPr>
+          <a:xfrm>
+            <a:off x="6367765" y="945335"/>
+            <a:ext cx="1186695" cy="1384995"/>
+          </a:xfrm>
+          <a:prstGeom prst="rect">
+            <a:avLst/>
+          </a:prstGeom>
+          <a:noFill/>
+          <a:ln>
+            <a:noFill/>
+          </a:ln>
+        </p:spPr>
+        <p:txBody>
+          <a:bodyPr spcFirstLastPara="1" wrap="square" lIns="0" tIns="0" rIns="0" bIns="0" anchor="ctr" anchorCtr="0">
+            <a:spAutoFit/>
+          </a:bodyPr>
+          <a:lstStyle/>
+          <a:p>
+            <a:pPr marL="0" marR="0" lvl="0" indent="0" algn="l" rtl="0">
+              <a:lnSpc>
+                <a:spcPct val="100000"/>
+              </a:lnSpc>
+              <a:spcBef>
+                <a:spcPts val="0"/>
+              </a:spcBef>
+              <a:spcAft>
+                <a:spcPts val="0"/>
+              </a:spcAft>
+              <a:buClr>
+                <a:srgbClr val="1A365D"/>
+              </a:buClr>
+              <a:buSzPts val="1125"/>
+              <a:buFont typeface="Montserrat"/>
+              <a:buNone/>
+            </a:pPr>
+            <a:r>
+              <a:rPr lang="en-US" sz="1125" b="0" i="0" u="none" strike="noStrike" cap="none" dirty="0" err="1">
+                <a:solidFill>
+                  <a:srgbClr val="1A365D"/>
+                </a:solidFill>
+                <a:latin typeface="Montserrat"/>
+                <a:ea typeface="Montserrat"/>
+                <a:cs typeface="Montserrat"/>
+                <a:sym typeface="Montserrat"/>
+              </a:rPr>
+              <a:t>Pergunta</a:t>
+            </a:r>
+            <a:r>
+              <a:rPr lang="en-US" sz="1125" b="0" i="0" u="none" strike="noStrike" cap="none" dirty="0">
+                <a:solidFill>
+                  <a:srgbClr val="1A365D"/>
+                </a:solidFill>
+                <a:latin typeface="Montserrat"/>
+                <a:ea typeface="Montserrat"/>
+                <a:cs typeface="Montserrat"/>
+                <a:sym typeface="Montserrat"/>
+              </a:rPr>
+              <a:t>:</a:t>
             </a:r>
             <a:br>
-              <a:rPr lang="en-US" sz="1125" b="1" i="0" u="none" strike="noStrike" cap="none">
+              <a:rPr lang="en-US" sz="1125" b="1" i="0" u="none" strike="noStrike" cap="none" dirty="0">
                 <a:solidFill>
                   <a:srgbClr val="1A365D"/>
                 </a:solidFill>
@@ -16655,24 +16706,19 @@
               </a:rPr>
             </a:br>
             <a:r>
-              <a:rPr lang="en-US" sz="1125" b="1" i="0" u="none" strike="noStrike" cap="none">
+              <a:rPr lang="pt-BR" sz="1125" b="1" dirty="0">
                 <a:solidFill>
                   <a:srgbClr val="1A365D"/>
                 </a:solidFill>
                 <a:latin typeface="Montserrat"/>
-                <a:ea typeface="Montserrat"/>
-                <a:cs typeface="Montserrat"/>
-                <a:sym typeface="Montserrat"/>
               </a:rPr>
-              <a:t>carga de NFS-e em imagem</a:t>
+              <a:t>Qual é o Valor do ICMS e o Valor Total da NF-e para fins de conferência contábil e fiscal?</a:t>
             </a:r>
-            <a:endParaRPr sz="1125" b="0" i="0" u="none" strike="noStrike" cap="none">
-              <a:solidFill>
-                <a:schemeClr val="dk1"/>
-              </a:solidFill>
-              <a:latin typeface="Calibri"/>
-              <a:ea typeface="Calibri"/>
-              <a:cs typeface="Calibri"/>
+            <a:endParaRPr sz="1125" b="1" dirty="0">
+              <a:solidFill>
+                <a:srgbClr val="1A365D"/>
+              </a:solidFill>
+              <a:latin typeface="Montserrat"/>
               <a:sym typeface="Calibri"/>
             </a:endParaRPr>
           </a:p>
@@ -16693,35 +16739,8 @@
         </p:blipFill>
         <p:spPr>
           <a:xfrm>
-            <a:off x="1321289" y="915469"/>
+            <a:off x="3002915" y="945335"/>
             <a:ext cx="3138170" cy="3915410"/>
-          </a:xfrm>
-          <a:prstGeom prst="rect">
-            <a:avLst/>
-          </a:prstGeom>
-          <a:noFill/>
-          <a:ln>
-            <a:noFill/>
-          </a:ln>
-        </p:spPr>
-      </p:pic>
-      <p:pic>
-        <p:nvPicPr>
-          <p:cNvPr id="271" name="Google Shape;271;p10"/>
-          <p:cNvPicPr preferRelativeResize="0"/>
-          <p:nvPr/>
-        </p:nvPicPr>
-        <p:blipFill rotWithShape="1">
-          <a:blip r:embed="rId4">
-            <a:alphaModFix/>
-          </a:blip>
-          <a:srcRect/>
-          <a:stretch/>
-        </p:blipFill>
-        <p:spPr>
-          <a:xfrm>
-            <a:off x="4510644" y="915469"/>
-            <a:ext cx="3131185" cy="4001135"/>
           </a:xfrm>
           <a:prstGeom prst="rect">
             <a:avLst/>

--- a/Desafio 2 - Projeto - 11062025/Projeto Final - Artefatos/I2A2_Agentes_Inteligentes_Projeto_Final_Grupo1.pptx
+++ b/Desafio 2 - Projeto - 11062025/Projeto Final - Artefatos/I2A2_Agentes_Inteligentes_Projeto_Final_Grupo1.pptx
@@ -16,7 +16,7 @@
     <p:sldId id="261" r:id="rId7"/>
     <p:sldId id="262" r:id="rId8"/>
     <p:sldId id="263" r:id="rId9"/>
-    <p:sldId id="264" r:id="rId10"/>
+    <p:sldId id="266" r:id="rId10"/>
     <p:sldId id="265" r:id="rId11"/>
   </p:sldIdLst>
   <p:sldSz cx="9144000" cy="5143500" type="screen16x9"/>
@@ -2614,7 +2614,7 @@
   <p:cSld>
     <p:spTree>
       <p:nvGrpSpPr>
-        <p:cNvPr id="1" name="Shape 272"/>
+        <p:cNvPr id="1" name="Shape 262"/>
         <p:cNvGrpSpPr/>
         <p:nvPr/>
       </p:nvGrpSpPr>
@@ -2628,7 +2628,7 @@
       </p:grpSpPr>
       <p:sp>
         <p:nvSpPr>
-          <p:cNvPr id="273" name="Google Shape;273;p11:notes"/>
+          <p:cNvPr id="263" name="Google Shape;263;p10:notes"/>
           <p:cNvSpPr>
             <a:spLocks noGrp="1" noRot="1" noChangeAspect="1"/>
           </p:cNvSpPr>
@@ -2673,7 +2673,7 @@
       </p:sp>
       <p:sp>
         <p:nvSpPr>
-          <p:cNvPr id="274" name="Google Shape;274;p11:notes"/>
+          <p:cNvPr id="264" name="Google Shape;264;p10:notes"/>
           <p:cNvSpPr txBox="1">
             <a:spLocks noGrp="1"/>
           </p:cNvSpPr>
@@ -2727,7 +2727,7 @@
       </p:sp>
       <p:sp>
         <p:nvSpPr>
-          <p:cNvPr id="275" name="Google Shape;275;p11:notes"/>
+          <p:cNvPr id="265" name="Google Shape;265;p10:notes"/>
           <p:cNvSpPr txBox="1">
             <a:spLocks noGrp="1"/>
           </p:cNvSpPr>
@@ -2796,6 +2796,11 @@
         </p:txBody>
       </p:sp>
     </p:spTree>
+    <p:extLst>
+      <p:ext uri="{BB962C8B-B14F-4D97-AF65-F5344CB8AC3E}">
+        <p14:creationId xmlns:p14="http://schemas.microsoft.com/office/powerpoint/2010/main" val="1334751225"/>
+      </p:ext>
+    </p:extLst>
   </p:cSld>
   <p:clrMapOvr>
     <a:masterClrMapping/>
@@ -16726,29 +16731,32 @@
       </p:sp>
       <p:pic>
         <p:nvPicPr>
-          <p:cNvPr id="270" name="Google Shape;270;p10"/>
-          <p:cNvPicPr preferRelativeResize="0"/>
+          <p:cNvPr id="3" name="Imagem 2">
+            <a:extLst>
+              <a:ext uri="{FF2B5EF4-FFF2-40B4-BE49-F238E27FC236}">
+                <a16:creationId xmlns:a16="http://schemas.microsoft.com/office/drawing/2014/main" id="{60287C85-0DA7-4B9C-B01C-52C68B1ECDBD}"/>
+              </a:ext>
+            </a:extLst>
+          </p:cNvPr>
+          <p:cNvPicPr>
+            <a:picLocks noChangeAspect="1"/>
+          </p:cNvPicPr>
           <p:nvPr/>
         </p:nvPicPr>
-        <p:blipFill rotWithShape="1">
-          <a:blip r:embed="rId3">
-            <a:alphaModFix/>
-          </a:blip>
-          <a:srcRect/>
-          <a:stretch/>
+        <p:blipFill>
+          <a:blip r:embed="rId3"/>
+          <a:stretch>
+            <a:fillRect/>
+          </a:stretch>
         </p:blipFill>
         <p:spPr>
           <a:xfrm>
-            <a:off x="3002915" y="945335"/>
-            <a:ext cx="3138170" cy="3915410"/>
-          </a:xfrm>
-          <a:prstGeom prst="rect">
-            <a:avLst/>
-          </a:prstGeom>
-          <a:noFill/>
-          <a:ln>
-            <a:noFill/>
-          </a:ln>
+            <a:off x="3286872" y="696918"/>
+            <a:ext cx="2541564" cy="4369535"/>
+          </a:xfrm>
+          <a:prstGeom prst="rect">
+            <a:avLst/>
+          </a:prstGeom>
         </p:spPr>
       </p:pic>
     </p:spTree>
@@ -16762,17 +16770,9 @@
 <file path=ppt/slides/slide9.xml><?xml version="1.0" encoding="utf-8"?>
 <p:sld xmlns:a="http://schemas.openxmlformats.org/drawingml/2006/main" xmlns:r="http://schemas.openxmlformats.org/officeDocument/2006/relationships" xmlns:p="http://schemas.openxmlformats.org/presentationml/2006/main">
   <p:cSld>
-    <p:bg>
-      <p:bgPr>
-        <a:solidFill>
-          <a:schemeClr val="lt2"/>
-        </a:solidFill>
-        <a:effectLst/>
-      </p:bgPr>
-    </p:bg>
     <p:spTree>
       <p:nvGrpSpPr>
-        <p:cNvPr id="1" name="Shape 276"/>
+        <p:cNvPr id="1" name="Shape 266"/>
         <p:cNvGrpSpPr/>
         <p:nvPr/>
       </p:nvGrpSpPr>
@@ -16786,7 +16786,7 @@
       </p:grpSpPr>
       <p:sp>
         <p:nvSpPr>
-          <p:cNvPr id="277" name="Google Shape;277;p11"/>
+          <p:cNvPr id="267" name="Google Shape;267;p10"/>
           <p:cNvSpPr/>
           <p:nvPr/>
         </p:nvSpPr>
@@ -16864,14 +16864,14 @@
       </p:sp>
       <p:sp>
         <p:nvSpPr>
-          <p:cNvPr id="278" name="Google Shape;278;p11"/>
-          <p:cNvSpPr/>
-          <p:nvPr/>
-        </p:nvSpPr>
-        <p:spPr>
-          <a:xfrm>
-            <a:off x="6279850" y="1378146"/>
-            <a:ext cx="1186695" cy="519373"/>
+          <p:cNvPr id="268" name="Google Shape;268;p10"/>
+          <p:cNvSpPr/>
+          <p:nvPr/>
+        </p:nvSpPr>
+        <p:spPr>
+          <a:xfrm>
+            <a:off x="1677667" y="945335"/>
+            <a:ext cx="1098568" cy="519373"/>
           </a:xfrm>
           <a:prstGeom prst="rect">
             <a:avLst/>
@@ -16887,7 +16887,7 @@
           </a:bodyPr>
           <a:lstStyle/>
           <a:p>
-            <a:pPr marL="0" marR="0" lvl="0" indent="0" algn="l" rtl="0">
+            <a:pPr marL="0" marR="0" lvl="0" indent="0" algn="r" rtl="0">
               <a:lnSpc>
                 <a:spcPct val="100000"/>
               </a:lnSpc>
@@ -16905,7 +16905,7 @@
               <a:buNone/>
             </a:pPr>
             <a:r>
-              <a:rPr lang="en-US" sz="1125" b="0" i="0" u="none" strike="noStrike" cap="none">
+              <a:rPr lang="en-US" sz="1125" b="0" i="0" u="none" strike="noStrike" cap="none" dirty="0" err="1">
                 <a:solidFill>
                   <a:srgbClr val="1A365D"/>
                 </a:solidFill>
@@ -16914,10 +16914,22 @@
                 <a:cs typeface="Montserrat"/>
                 <a:sym typeface="Montserrat"/>
               </a:rPr>
-              <a:t>Exemplo:</a:t>
+              <a:t>Exemplo</a:t>
+            </a:r>
+            <a:r>
+              <a:rPr lang="en-US" sz="1125" b="0" i="0" u="none" strike="noStrike" cap="none" dirty="0">
+                <a:solidFill>
+                  <a:srgbClr val="1A365D"/>
+                </a:solidFill>
+                <a:latin typeface="Montserrat"/>
+                <a:ea typeface="Montserrat"/>
+                <a:cs typeface="Montserrat"/>
+                <a:sym typeface="Montserrat"/>
+              </a:rPr>
+              <a:t>:</a:t>
             </a:r>
             <a:br>
-              <a:rPr lang="en-US" sz="1125" b="1" i="0" u="none" strike="noStrike" cap="none">
+              <a:rPr lang="en-US" sz="1125" b="0" i="0" u="none" strike="noStrike" cap="none" dirty="0">
                 <a:solidFill>
                   <a:srgbClr val="1A365D"/>
                 </a:solidFill>
@@ -16928,7 +16940,7 @@
               </a:rPr>
             </a:br>
             <a:r>
-              <a:rPr lang="en-US" sz="1125" b="1" i="0" u="none" strike="noStrike" cap="none">
+              <a:rPr lang="en-US" sz="1125" b="1" i="0" u="none" strike="noStrike" cap="none" dirty="0">
                 <a:solidFill>
                   <a:srgbClr val="1A365D"/>
                 </a:solidFill>
@@ -16937,9 +16949,33 @@
                 <a:cs typeface="Montserrat"/>
                 <a:sym typeface="Montserrat"/>
               </a:rPr>
-              <a:t>carga de CT-e em imagem</a:t>
+              <a:t>carga de NF-e </a:t>
             </a:r>
-            <a:endParaRPr sz="1125" b="0" i="0" u="none" strike="noStrike" cap="none">
+            <a:r>
+              <a:rPr lang="en-US" sz="1125" b="1" i="0" u="none" strike="noStrike" cap="none" dirty="0" err="1">
+                <a:solidFill>
+                  <a:srgbClr val="1A365D"/>
+                </a:solidFill>
+                <a:latin typeface="Montserrat"/>
+                <a:ea typeface="Montserrat"/>
+                <a:cs typeface="Montserrat"/>
+                <a:sym typeface="Montserrat"/>
+              </a:rPr>
+              <a:t>em</a:t>
+            </a:r>
+            <a:r>
+              <a:rPr lang="en-US" sz="1125" b="1" i="0" u="none" strike="noStrike" cap="none" dirty="0">
+                <a:solidFill>
+                  <a:srgbClr val="1A365D"/>
+                </a:solidFill>
+                <a:latin typeface="Montserrat"/>
+                <a:ea typeface="Montserrat"/>
+                <a:cs typeface="Montserrat"/>
+                <a:sym typeface="Montserrat"/>
+              </a:rPr>
+              <a:t> XML</a:t>
+            </a:r>
+            <a:endParaRPr sz="1125" b="0" i="0" u="none" strike="noStrike" cap="none" dirty="0">
               <a:solidFill>
                 <a:schemeClr val="dk1"/>
               </a:solidFill>
@@ -16951,34 +16987,138 @@
           </a:p>
         </p:txBody>
       </p:sp>
+      <p:sp>
+        <p:nvSpPr>
+          <p:cNvPr id="269" name="Google Shape;269;p10"/>
+          <p:cNvSpPr/>
+          <p:nvPr/>
+        </p:nvSpPr>
+        <p:spPr>
+          <a:xfrm>
+            <a:off x="6339073" y="945335"/>
+            <a:ext cx="1186695" cy="1211870"/>
+          </a:xfrm>
+          <a:prstGeom prst="rect">
+            <a:avLst/>
+          </a:prstGeom>
+          <a:noFill/>
+          <a:ln>
+            <a:noFill/>
+          </a:ln>
+        </p:spPr>
+        <p:txBody>
+          <a:bodyPr spcFirstLastPara="1" wrap="square" lIns="0" tIns="0" rIns="0" bIns="0" anchor="ctr" anchorCtr="0">
+            <a:spAutoFit/>
+          </a:bodyPr>
+          <a:lstStyle/>
+          <a:p>
+            <a:pPr marL="0" marR="0" lvl="0" indent="0" algn="l" rtl="0">
+              <a:lnSpc>
+                <a:spcPct val="100000"/>
+              </a:lnSpc>
+              <a:spcBef>
+                <a:spcPts val="0"/>
+              </a:spcBef>
+              <a:spcAft>
+                <a:spcPts val="0"/>
+              </a:spcAft>
+              <a:buClr>
+                <a:srgbClr val="1A365D"/>
+              </a:buClr>
+              <a:buSzPts val="1125"/>
+              <a:buFont typeface="Montserrat"/>
+              <a:buNone/>
+            </a:pPr>
+            <a:r>
+              <a:rPr lang="en-US" sz="1125" b="0" i="0" u="none" strike="noStrike" cap="none" dirty="0" err="1">
+                <a:solidFill>
+                  <a:srgbClr val="1A365D"/>
+                </a:solidFill>
+                <a:latin typeface="Montserrat"/>
+                <a:ea typeface="Montserrat"/>
+                <a:cs typeface="Montserrat"/>
+                <a:sym typeface="Montserrat"/>
+              </a:rPr>
+              <a:t>Pergunta</a:t>
+            </a:r>
+            <a:r>
+              <a:rPr lang="en-US" sz="1125" b="0" i="0" u="none" strike="noStrike" cap="none" dirty="0">
+                <a:solidFill>
+                  <a:srgbClr val="1A365D"/>
+                </a:solidFill>
+                <a:latin typeface="Montserrat"/>
+                <a:ea typeface="Montserrat"/>
+                <a:cs typeface="Montserrat"/>
+                <a:sym typeface="Montserrat"/>
+              </a:rPr>
+              <a:t>:</a:t>
+            </a:r>
+            <a:br>
+              <a:rPr lang="en-US" sz="1125" b="1" i="0" u="none" strike="noStrike" cap="none" dirty="0">
+                <a:solidFill>
+                  <a:srgbClr val="1A365D"/>
+                </a:solidFill>
+                <a:latin typeface="Montserrat"/>
+                <a:ea typeface="Montserrat"/>
+                <a:cs typeface="Montserrat"/>
+                <a:sym typeface="Montserrat"/>
+              </a:rPr>
+            </a:br>
+            <a:r>
+              <a:rPr lang="pt-BR" sz="1125" b="1" dirty="0">
+                <a:solidFill>
+                  <a:srgbClr val="1A365D"/>
+                </a:solidFill>
+                <a:latin typeface="Montserrat"/>
+              </a:rPr>
+              <a:t>O documento possui o Protocolo de Autorização de Uso emitido pela Sefaz ?</a:t>
+            </a:r>
+            <a:endParaRPr sz="1125" b="1" dirty="0">
+              <a:solidFill>
+                <a:srgbClr val="1A365D"/>
+              </a:solidFill>
+              <a:latin typeface="Montserrat"/>
+              <a:sym typeface="Calibri"/>
+            </a:endParaRPr>
+          </a:p>
+        </p:txBody>
+      </p:sp>
       <p:pic>
         <p:nvPicPr>
-          <p:cNvPr id="279" name="Google Shape;279;p11"/>
-          <p:cNvPicPr preferRelativeResize="0"/>
+          <p:cNvPr id="4" name="Imagem 3">
+            <a:extLst>
+              <a:ext uri="{FF2B5EF4-FFF2-40B4-BE49-F238E27FC236}">
+                <a16:creationId xmlns:a16="http://schemas.microsoft.com/office/drawing/2014/main" id="{47EC033B-5EB4-4B5F-BA5C-431EB1DABAD4}"/>
+              </a:ext>
+            </a:extLst>
+          </p:cNvPr>
+          <p:cNvPicPr>
+            <a:picLocks noChangeAspect="1"/>
+          </p:cNvPicPr>
           <p:nvPr/>
         </p:nvPicPr>
-        <p:blipFill rotWithShape="1">
-          <a:blip r:embed="rId3">
-            <a:alphaModFix/>
-          </a:blip>
-          <a:srcRect/>
-          <a:stretch/>
+        <p:blipFill>
+          <a:blip r:embed="rId3"/>
+          <a:stretch>
+            <a:fillRect/>
+          </a:stretch>
         </p:blipFill>
         <p:spPr>
           <a:xfrm>
-            <a:off x="2968336" y="771635"/>
-            <a:ext cx="3207327" cy="4144928"/>
-          </a:xfrm>
-          <a:prstGeom prst="rect">
-            <a:avLst/>
-          </a:prstGeom>
-          <a:noFill/>
-          <a:ln>
-            <a:noFill/>
-          </a:ln>
+            <a:off x="2965607" y="880532"/>
+            <a:ext cx="3212786" cy="3014135"/>
+          </a:xfrm>
+          <a:prstGeom prst="rect">
+            <a:avLst/>
+          </a:prstGeom>
         </p:spPr>
       </p:pic>
     </p:spTree>
+    <p:extLst>
+      <p:ext uri="{BB962C8B-B14F-4D97-AF65-F5344CB8AC3E}">
+        <p14:creationId xmlns:p14="http://schemas.microsoft.com/office/powerpoint/2010/main" val="3141520723"/>
+      </p:ext>
+    </p:extLst>
   </p:cSld>
   <p:clrMapOvr>
     <a:masterClrMapping/>

--- a/Desafio 2 - Projeto - 11062025/Projeto Final - Artefatos/I2A2_Agentes_Inteligentes_Projeto_Final_Grupo1.pptx
+++ b/Desafio 2 - Projeto - 11062025/Projeto Final - Artefatos/I2A2_Agentes_Inteligentes_Projeto_Final_Grupo1.pptx
@@ -5,7 +5,7 @@
     <p:sldMasterId id="2147483648" r:id="rId1"/>
   </p:sldMasterIdLst>
   <p:notesMasterIdLst>
-    <p:notesMasterId r:id="rId12"/>
+    <p:notesMasterId r:id="rId11"/>
   </p:notesMasterIdLst>
   <p:sldIdLst>
     <p:sldId id="256" r:id="rId2"/>
@@ -16,32 +16,31 @@
     <p:sldId id="261" r:id="rId7"/>
     <p:sldId id="262" r:id="rId8"/>
     <p:sldId id="263" r:id="rId9"/>
-    <p:sldId id="266" r:id="rId10"/>
-    <p:sldId id="265" r:id="rId11"/>
+    <p:sldId id="265" r:id="rId10"/>
   </p:sldIdLst>
   <p:sldSz cx="9144000" cy="5143500" type="screen16x9"/>
   <p:notesSz cx="5143500" cy="9144000"/>
   <p:embeddedFontLst>
     <p:embeddedFont>
       <p:font typeface="Calibri" panose="020F0502020204030204" pitchFamily="34" charset="0"/>
-      <p:regular r:id="rId13"/>
-      <p:bold r:id="rId14"/>
-      <p:italic r:id="rId15"/>
-      <p:boldItalic r:id="rId16"/>
+      <p:regular r:id="rId12"/>
+      <p:bold r:id="rId13"/>
+      <p:italic r:id="rId14"/>
+      <p:boldItalic r:id="rId15"/>
     </p:embeddedFont>
     <p:embeddedFont>
       <p:font typeface="Montserrat" panose="00000500000000000000" pitchFamily="2" charset="0"/>
-      <p:regular r:id="rId17"/>
-      <p:bold r:id="rId18"/>
-      <p:italic r:id="rId19"/>
-      <p:boldItalic r:id="rId20"/>
+      <p:regular r:id="rId16"/>
+      <p:bold r:id="rId17"/>
+      <p:italic r:id="rId18"/>
+      <p:boldItalic r:id="rId19"/>
     </p:embeddedFont>
     <p:embeddedFont>
       <p:font typeface="Open Sans" panose="020B0606030504020204" pitchFamily="34" charset="0"/>
-      <p:regular r:id="rId21"/>
-      <p:bold r:id="rId22"/>
-      <p:italic r:id="rId23"/>
-      <p:boldItalic r:id="rId24"/>
+      <p:regular r:id="rId20"/>
+      <p:bold r:id="rId21"/>
+      <p:italic r:id="rId22"/>
+      <p:boldItalic r:id="rId23"/>
     </p:embeddedFont>
   </p:embeddedFontLst>
   <p:defaultTextStyle>
@@ -278,7 +277,7 @@
       <p15:sldGuideLst xmlns:p15="http://schemas.microsoft.com/office/powerpoint/2012/main"/>
     </p:ext>
     <p:ext uri="GoogleSlidesCustomDataVersion2">
-      <go:slidesCustomData xmlns="" xmlns:mc="http://schemas.openxmlformats.org/markup-compatibility/2006" xmlns:mv="urn:schemas-microsoft-com:mac:vml" xmlns:c="http://schemas.openxmlformats.org/drawingml/2006/chart" xmlns:dgm="http://schemas.openxmlformats.org/drawingml/2006/diagram" xmlns:o="urn:schemas-microsoft-com:office:office" xmlns:v="urn:schemas-microsoft-com:vml" xmlns:pvml="urn:schemas-microsoft-com:office:powerpoint" xmlns:com="http://schemas.openxmlformats.org/drawingml/2006/compatibility" xmlns:p14="http://schemas.microsoft.com/office/powerpoint/2010/main" xmlns:p15="http://schemas.microsoft.com/office/powerpoint/2012/main" xmlns:ahyp="http://schemas.microsoft.com/office/drawing/2018/hyperlinkcolor" xmlns:go="http://customooxmlschemas.google.com/" r:id="rId25" roundtripDataSignature="AMtx7mh5HV7jsEe0+dscwCawAtKCTcPn5w=="/>
+      <go:slidesCustomData xmlns:go="http://customooxmlschemas.google.com/" xmlns:ahyp="http://schemas.microsoft.com/office/drawing/2018/hyperlinkcolor" xmlns:p15="http://schemas.microsoft.com/office/powerpoint/2012/main" xmlns:p14="http://schemas.microsoft.com/office/powerpoint/2010/main" xmlns:com="http://schemas.openxmlformats.org/drawingml/2006/compatibility" xmlns:pvml="urn:schemas-microsoft-com:office:powerpoint" xmlns:v="urn:schemas-microsoft-com:vml" xmlns:o="urn:schemas-microsoft-com:office:office" xmlns:dgm="http://schemas.openxmlformats.org/drawingml/2006/diagram" xmlns:c="http://schemas.openxmlformats.org/drawingml/2006/chart" xmlns:mv="urn:schemas-microsoft-com:mac:vml" xmlns:mc="http://schemas.openxmlformats.org/markup-compatibility/2006" xmlns="" r:id="rId25" roundtripDataSignature="AMtx7mh5HV7jsEe0+dscwCawAtKCTcPn5w=="/>
     </p:ext>
   </p:extLst>
 </p:presentation>
@@ -1057,200 +1056,6 @@
 </p:notes>
 </file>
 
-<file path=ppt/notesSlides/notesSlide10.xml><?xml version="1.0" encoding="utf-8"?>
-<p:notes xmlns:a="http://schemas.openxmlformats.org/drawingml/2006/main" xmlns:r="http://schemas.openxmlformats.org/officeDocument/2006/relationships" xmlns:p="http://schemas.openxmlformats.org/presentationml/2006/main" showMasterSp="0" showMasterPhAnim="0">
-  <p:cSld>
-    <p:spTree>
-      <p:nvGrpSpPr>
-        <p:cNvPr id="1" name="Shape 280"/>
-        <p:cNvGrpSpPr/>
-        <p:nvPr/>
-      </p:nvGrpSpPr>
-      <p:grpSpPr>
-        <a:xfrm>
-          <a:off x="0" y="0"/>
-          <a:ext cx="0" cy="0"/>
-          <a:chOff x="0" y="0"/>
-          <a:chExt cx="0" cy="0"/>
-        </a:xfrm>
-      </p:grpSpPr>
-      <p:sp>
-        <p:nvSpPr>
-          <p:cNvPr id="281" name="Google Shape;281;p12:notes"/>
-          <p:cNvSpPr>
-            <a:spLocks noGrp="1" noRot="1" noChangeAspect="1"/>
-          </p:cNvSpPr>
-          <p:nvPr>
-            <p:ph type="sldImg" idx="2"/>
-          </p:nvPr>
-        </p:nvSpPr>
-        <p:spPr>
-          <a:xfrm>
-            <a:off x="-1166813" y="0"/>
-            <a:ext cx="5334001" cy="3000375"/>
-          </a:xfrm>
-          <a:custGeom>
-            <a:avLst/>
-            <a:gdLst/>
-            <a:ahLst/>
-            <a:cxnLst/>
-            <a:rect l="l" t="t" r="r" b="b"/>
-            <a:pathLst>
-              <a:path w="120000" h="120000" extrusionOk="0">
-                <a:moveTo>
-                  <a:pt x="0" y="0"/>
-                </a:moveTo>
-                <a:lnTo>
-                  <a:pt x="120000" y="0"/>
-                </a:lnTo>
-                <a:lnTo>
-                  <a:pt x="120000" y="120000"/>
-                </a:lnTo>
-                <a:lnTo>
-                  <a:pt x="0" y="120000"/>
-                </a:lnTo>
-                <a:close/>
-              </a:path>
-            </a:pathLst>
-          </a:custGeom>
-          <a:noFill/>
-          <a:ln>
-            <a:noFill/>
-          </a:ln>
-        </p:spPr>
-      </p:sp>
-      <p:sp>
-        <p:nvSpPr>
-          <p:cNvPr id="282" name="Google Shape;282;p12:notes"/>
-          <p:cNvSpPr txBox="1">
-            <a:spLocks noGrp="1"/>
-          </p:cNvSpPr>
-          <p:nvPr>
-            <p:ph type="body" idx="1"/>
-          </p:nvPr>
-        </p:nvSpPr>
-        <p:spPr>
-          <a:xfrm>
-            <a:off x="0" y="0"/>
-            <a:ext cx="3000000" cy="3000000"/>
-          </a:xfrm>
-          <a:prstGeom prst="rect">
-            <a:avLst/>
-          </a:prstGeom>
-          <a:noFill/>
-          <a:ln>
-            <a:noFill/>
-          </a:ln>
-        </p:spPr>
-        <p:txBody>
-          <a:bodyPr spcFirstLastPara="1" wrap="square" lIns="91425" tIns="45700" rIns="91425" bIns="45700" anchor="t" anchorCtr="0">
-            <a:noAutofit/>
-          </a:bodyPr>
-          <a:lstStyle/>
-          <a:p>
-            <a:pPr marL="0" marR="0" lvl="0" indent="0" algn="l" rtl="0">
-              <a:lnSpc>
-                <a:spcPct val="100000"/>
-              </a:lnSpc>
-              <a:spcBef>
-                <a:spcPts val="0"/>
-              </a:spcBef>
-              <a:spcAft>
-                <a:spcPts val="0"/>
-              </a:spcAft>
-              <a:buSzPts val="1100"/>
-              <a:buNone/>
-            </a:pPr>
-            <a:endParaRPr sz="1200">
-              <a:solidFill>
-                <a:schemeClr val="dk1"/>
-              </a:solidFill>
-              <a:latin typeface="Calibri"/>
-              <a:ea typeface="Calibri"/>
-              <a:cs typeface="Calibri"/>
-              <a:sym typeface="Calibri"/>
-            </a:endParaRPr>
-          </a:p>
-        </p:txBody>
-      </p:sp>
-      <p:sp>
-        <p:nvSpPr>
-          <p:cNvPr id="283" name="Google Shape;283;p12:notes"/>
-          <p:cNvSpPr txBox="1">
-            <a:spLocks noGrp="1"/>
-          </p:cNvSpPr>
-          <p:nvPr>
-            <p:ph type="sldNum" idx="12"/>
-          </p:nvPr>
-        </p:nvSpPr>
-        <p:spPr>
-          <a:xfrm>
-            <a:off x="0" y="0"/>
-            <a:ext cx="3000000" cy="3000000"/>
-          </a:xfrm>
-          <a:prstGeom prst="rect">
-            <a:avLst/>
-          </a:prstGeom>
-          <a:noFill/>
-          <a:ln>
-            <a:noFill/>
-          </a:ln>
-        </p:spPr>
-        <p:txBody>
-          <a:bodyPr spcFirstLastPara="1" wrap="square" lIns="91425" tIns="45700" rIns="91425" bIns="45700" anchor="t" anchorCtr="0">
-            <a:noAutofit/>
-          </a:bodyPr>
-          <a:lstStyle/>
-          <a:p>
-            <a:pPr marL="0" marR="0" lvl="0" indent="0" algn="l" rtl="0">
-              <a:lnSpc>
-                <a:spcPct val="100000"/>
-              </a:lnSpc>
-              <a:spcBef>
-                <a:spcPts val="0"/>
-              </a:spcBef>
-              <a:spcAft>
-                <a:spcPts val="0"/>
-              </a:spcAft>
-              <a:buClr>
-                <a:srgbClr val="000000"/>
-              </a:buClr>
-              <a:buSzPts val="1800"/>
-              <a:buFont typeface="Arial"/>
-              <a:buNone/>
-            </a:pPr>
-            <a:fld id="{00000000-1234-1234-1234-123412341234}" type="slidenum">
-              <a:rPr lang="en-US" sz="1800" b="0" i="0" u="none" strike="noStrike" cap="none">
-                <a:solidFill>
-                  <a:schemeClr val="dk1"/>
-                </a:solidFill>
-                <a:latin typeface="Calibri"/>
-                <a:ea typeface="Calibri"/>
-                <a:cs typeface="Calibri"/>
-                <a:sym typeface="Calibri"/>
-              </a:rPr>
-              <a:t>10</a:t>
-            </a:fld>
-            <a:endParaRPr sz="1800" b="0" i="0" u="none" strike="noStrike" cap="none">
-              <a:solidFill>
-                <a:schemeClr val="dk1"/>
-              </a:solidFill>
-              <a:latin typeface="Calibri"/>
-              <a:ea typeface="Calibri"/>
-              <a:cs typeface="Calibri"/>
-              <a:sym typeface="Calibri"/>
-            </a:endParaRPr>
-          </a:p>
-        </p:txBody>
-      </p:sp>
-    </p:spTree>
-  </p:cSld>
-  <p:clrMapOvr>
-    <a:masterClrMapping/>
-  </p:clrMapOvr>
-</p:notes>
-</file>
-
 <file path=ppt/notesSlides/notesSlide2.xml><?xml version="1.0" encoding="utf-8"?>
 <p:notes xmlns:a="http://schemas.openxmlformats.org/drawingml/2006/main" xmlns:r="http://schemas.openxmlformats.org/officeDocument/2006/relationships" xmlns:p="http://schemas.openxmlformats.org/presentationml/2006/main" showMasterSp="0" showMasterPhAnim="0">
   <p:cSld>
@@ -2614,7 +2419,7 @@
   <p:cSld>
     <p:spTree>
       <p:nvGrpSpPr>
-        <p:cNvPr id="1" name="Shape 262"/>
+        <p:cNvPr id="1" name="Shape 280"/>
         <p:cNvGrpSpPr/>
         <p:nvPr/>
       </p:nvGrpSpPr>
@@ -2628,7 +2433,7 @@
       </p:grpSpPr>
       <p:sp>
         <p:nvSpPr>
-          <p:cNvPr id="263" name="Google Shape;263;p10:notes"/>
+          <p:cNvPr id="281" name="Google Shape;281;p12:notes"/>
           <p:cNvSpPr>
             <a:spLocks noGrp="1" noRot="1" noChangeAspect="1"/>
           </p:cNvSpPr>
@@ -2673,7 +2478,7 @@
       </p:sp>
       <p:sp>
         <p:nvSpPr>
-          <p:cNvPr id="264" name="Google Shape;264;p10:notes"/>
+          <p:cNvPr id="282" name="Google Shape;282;p12:notes"/>
           <p:cNvSpPr txBox="1">
             <a:spLocks noGrp="1"/>
           </p:cNvSpPr>
@@ -2727,7 +2532,7 @@
       </p:sp>
       <p:sp>
         <p:nvSpPr>
-          <p:cNvPr id="265" name="Google Shape;265;p10:notes"/>
+          <p:cNvPr id="283" name="Google Shape;283;p12:notes"/>
           <p:cNvSpPr txBox="1">
             <a:spLocks noGrp="1"/>
           </p:cNvSpPr>
@@ -2796,11 +2601,6 @@
         </p:txBody>
       </p:sp>
     </p:spTree>
-    <p:extLst>
-      <p:ext uri="{BB962C8B-B14F-4D97-AF65-F5344CB8AC3E}">
-        <p14:creationId xmlns:p14="http://schemas.microsoft.com/office/powerpoint/2010/main" val="1334751225"/>
-      </p:ext>
-    </p:extLst>
   </p:cSld>
   <p:clrMapOvr>
     <a:masterClrMapping/>
@@ -4954,385 +4754,6 @@
 </p:sld>
 </file>
 
-<file path=ppt/slides/slide10.xml><?xml version="1.0" encoding="utf-8"?>
-<p:sld xmlns:a="http://schemas.openxmlformats.org/drawingml/2006/main" xmlns:r="http://schemas.openxmlformats.org/officeDocument/2006/relationships" xmlns:p="http://schemas.openxmlformats.org/presentationml/2006/main">
-  <p:cSld>
-    <p:bg>
-      <p:bgPr>
-        <a:solidFill>
-          <a:srgbClr val="073763"/>
-        </a:solidFill>
-        <a:effectLst/>
-      </p:bgPr>
-    </p:bg>
-    <p:spTree>
-      <p:nvGrpSpPr>
-        <p:cNvPr id="1" name="Shape 284"/>
-        <p:cNvGrpSpPr/>
-        <p:nvPr/>
-      </p:nvGrpSpPr>
-      <p:grpSpPr>
-        <a:xfrm>
-          <a:off x="0" y="0"/>
-          <a:ext cx="0" cy="0"/>
-          <a:chOff x="0" y="0"/>
-          <a:chExt cx="0" cy="0"/>
-        </a:xfrm>
-      </p:grpSpPr>
-      <p:sp>
-        <p:nvSpPr>
-          <p:cNvPr id="285" name="Google Shape;285;p12"/>
-          <p:cNvSpPr/>
-          <p:nvPr/>
-        </p:nvSpPr>
-        <p:spPr>
-          <a:xfrm>
-            <a:off x="5248255" y="1220459"/>
-            <a:ext cx="2912776" cy="184666"/>
-          </a:xfrm>
-          <a:prstGeom prst="rect">
-            <a:avLst/>
-          </a:prstGeom>
-          <a:noFill/>
-          <a:ln>
-            <a:noFill/>
-          </a:ln>
-        </p:spPr>
-        <p:txBody>
-          <a:bodyPr spcFirstLastPara="1" wrap="square" lIns="0" tIns="0" rIns="0" bIns="0" anchor="ctr" anchorCtr="0">
-            <a:spAutoFit/>
-          </a:bodyPr>
-          <a:lstStyle/>
-          <a:p>
-            <a:pPr marL="0" marR="0" lvl="0" indent="0" algn="l" rtl="0">
-              <a:lnSpc>
-                <a:spcPct val="100000"/>
-              </a:lnSpc>
-              <a:spcBef>
-                <a:spcPts val="0"/>
-              </a:spcBef>
-              <a:spcAft>
-                <a:spcPts val="0"/>
-              </a:spcAft>
-              <a:buClr>
-                <a:srgbClr val="1A365D"/>
-              </a:buClr>
-              <a:buSzPts val="2700"/>
-              <a:buFont typeface="Montserrat"/>
-              <a:buNone/>
-            </a:pPr>
-            <a:r>
-              <a:rPr lang="en-US" sz="1200" b="1" i="0" u="none" strike="noStrike" cap="none">
-                <a:solidFill>
-                  <a:schemeClr val="lt1"/>
-                </a:solidFill>
-                <a:latin typeface="Montserrat"/>
-                <a:ea typeface="Montserrat"/>
-                <a:cs typeface="Montserrat"/>
-                <a:sym typeface="Montserrat"/>
-              </a:rPr>
-              <a:t>Integrantes do grupo:</a:t>
-            </a:r>
-            <a:endParaRPr sz="1200" b="0" i="0" u="none" strike="noStrike" cap="none">
-              <a:solidFill>
-                <a:schemeClr val="lt1"/>
-              </a:solidFill>
-              <a:latin typeface="Calibri"/>
-              <a:ea typeface="Calibri"/>
-              <a:cs typeface="Calibri"/>
-              <a:sym typeface="Calibri"/>
-            </a:endParaRPr>
-          </a:p>
-        </p:txBody>
-      </p:sp>
-      <p:sp>
-        <p:nvSpPr>
-          <p:cNvPr id="286" name="Google Shape;286;p12"/>
-          <p:cNvSpPr/>
-          <p:nvPr/>
-        </p:nvSpPr>
-        <p:spPr>
-          <a:xfrm>
-            <a:off x="5248255" y="2155094"/>
-            <a:ext cx="3058248" cy="1523494"/>
-          </a:xfrm>
-          <a:prstGeom prst="rect">
-            <a:avLst/>
-          </a:prstGeom>
-          <a:noFill/>
-          <a:ln>
-            <a:noFill/>
-          </a:ln>
-        </p:spPr>
-        <p:txBody>
-          <a:bodyPr spcFirstLastPara="1" wrap="square" lIns="0" tIns="0" rIns="0" bIns="0" anchor="ctr" anchorCtr="0">
-            <a:spAutoFit/>
-          </a:bodyPr>
-          <a:lstStyle/>
-          <a:p>
-            <a:pPr marL="0" marR="0" lvl="0" indent="0" algn="l" rtl="0">
-              <a:lnSpc>
-                <a:spcPct val="150000"/>
-              </a:lnSpc>
-              <a:spcBef>
-                <a:spcPts val="0"/>
-              </a:spcBef>
-              <a:spcAft>
-                <a:spcPts val="0"/>
-              </a:spcAft>
-              <a:buNone/>
-            </a:pPr>
-            <a:r>
-              <a:rPr lang="en-US" sz="1100" b="0" i="0" u="none" strike="noStrike" cap="none">
-                <a:solidFill>
-                  <a:schemeClr val="lt1"/>
-                </a:solidFill>
-                <a:latin typeface="Montserrat"/>
-                <a:ea typeface="Montserrat"/>
-                <a:cs typeface="Montserrat"/>
-                <a:sym typeface="Montserrat"/>
-              </a:rPr>
-              <a:t>Antonio João Nascimento Dantas</a:t>
-            </a:r>
-            <a:endParaRPr/>
-          </a:p>
-          <a:p>
-            <a:pPr marL="0" marR="0" lvl="0" indent="0" algn="l" rtl="0">
-              <a:lnSpc>
-                <a:spcPct val="150000"/>
-              </a:lnSpc>
-              <a:spcBef>
-                <a:spcPts val="0"/>
-              </a:spcBef>
-              <a:spcAft>
-                <a:spcPts val="0"/>
-              </a:spcAft>
-              <a:buNone/>
-            </a:pPr>
-            <a:r>
-              <a:rPr lang="en-US" sz="1100" b="0" i="0" u="none" strike="noStrike" cap="none">
-                <a:solidFill>
-                  <a:schemeClr val="lt1"/>
-                </a:solidFill>
-                <a:latin typeface="Montserrat"/>
-                <a:ea typeface="Montserrat"/>
-                <a:cs typeface="Montserrat"/>
-                <a:sym typeface="Montserrat"/>
-              </a:rPr>
-              <a:t>Daniel Correa Rodrigues</a:t>
-            </a:r>
-            <a:endParaRPr/>
-          </a:p>
-          <a:p>
-            <a:pPr marL="0" marR="0" lvl="0" indent="0" algn="l" rtl="0">
-              <a:lnSpc>
-                <a:spcPct val="150000"/>
-              </a:lnSpc>
-              <a:spcBef>
-                <a:spcPts val="0"/>
-              </a:spcBef>
-              <a:spcAft>
-                <a:spcPts val="0"/>
-              </a:spcAft>
-              <a:buNone/>
-            </a:pPr>
-            <a:r>
-              <a:rPr lang="en-US" sz="1100" b="0" i="0" u="none" strike="noStrike" cap="none">
-                <a:solidFill>
-                  <a:schemeClr val="lt1"/>
-                </a:solidFill>
-                <a:latin typeface="Montserrat"/>
-                <a:ea typeface="Montserrat"/>
-                <a:cs typeface="Montserrat"/>
-                <a:sym typeface="Montserrat"/>
-              </a:rPr>
-              <a:t>Eduarda Silveira Cardoso</a:t>
-            </a:r>
-            <a:endParaRPr/>
-          </a:p>
-          <a:p>
-            <a:pPr marL="0" marR="0" lvl="0" indent="0" algn="l" rtl="0">
-              <a:lnSpc>
-                <a:spcPct val="150000"/>
-              </a:lnSpc>
-              <a:spcBef>
-                <a:spcPts val="0"/>
-              </a:spcBef>
-              <a:spcAft>
-                <a:spcPts val="0"/>
-              </a:spcAft>
-              <a:buNone/>
-            </a:pPr>
-            <a:r>
-              <a:rPr lang="en-US" sz="1100" b="0" i="0" u="none" strike="noStrike" cap="none">
-                <a:solidFill>
-                  <a:schemeClr val="lt1"/>
-                </a:solidFill>
-                <a:latin typeface="Montserrat"/>
-                <a:ea typeface="Montserrat"/>
-                <a:cs typeface="Montserrat"/>
-                <a:sym typeface="Montserrat"/>
-              </a:rPr>
-              <a:t>Lorrane da F C Santos Santana</a:t>
-            </a:r>
-            <a:endParaRPr/>
-          </a:p>
-          <a:p>
-            <a:pPr marL="0" marR="0" lvl="0" indent="0" algn="l" rtl="0">
-              <a:lnSpc>
-                <a:spcPct val="150000"/>
-              </a:lnSpc>
-              <a:spcBef>
-                <a:spcPts val="0"/>
-              </a:spcBef>
-              <a:spcAft>
-                <a:spcPts val="0"/>
-              </a:spcAft>
-              <a:buNone/>
-            </a:pPr>
-            <a:r>
-              <a:rPr lang="en-US" sz="1100" b="0" i="0" u="none" strike="noStrike" cap="none">
-                <a:solidFill>
-                  <a:schemeClr val="lt1"/>
-                </a:solidFill>
-                <a:latin typeface="Montserrat"/>
-                <a:ea typeface="Montserrat"/>
-                <a:cs typeface="Montserrat"/>
-                <a:sym typeface="Montserrat"/>
-              </a:rPr>
-              <a:t>Luciane Schumacher</a:t>
-            </a:r>
-            <a:endParaRPr/>
-          </a:p>
-          <a:p>
-            <a:pPr marL="0" marR="0" lvl="0" indent="0" algn="l" rtl="0">
-              <a:lnSpc>
-                <a:spcPct val="150000"/>
-              </a:lnSpc>
-              <a:spcBef>
-                <a:spcPts val="0"/>
-              </a:spcBef>
-              <a:spcAft>
-                <a:spcPts val="0"/>
-              </a:spcAft>
-              <a:buNone/>
-            </a:pPr>
-            <a:r>
-              <a:rPr lang="en-US" sz="1100" b="0" i="0" u="none" strike="noStrike" cap="none">
-                <a:solidFill>
-                  <a:schemeClr val="lt1"/>
-                </a:solidFill>
-                <a:latin typeface="Montserrat"/>
-                <a:ea typeface="Montserrat"/>
-                <a:cs typeface="Montserrat"/>
-                <a:sym typeface="Montserrat"/>
-              </a:rPr>
-              <a:t>Valdinei de Souza Camargo</a:t>
-            </a:r>
-            <a:endParaRPr/>
-          </a:p>
-        </p:txBody>
-      </p:sp>
-      <p:cxnSp>
-        <p:nvCxnSpPr>
-          <p:cNvPr id="287" name="Google Shape;287;p12"/>
-          <p:cNvCxnSpPr/>
-          <p:nvPr/>
-        </p:nvCxnSpPr>
-        <p:spPr>
-          <a:xfrm>
-            <a:off x="4565073" y="1073727"/>
-            <a:ext cx="0" cy="3228109"/>
-          </a:xfrm>
-          <a:prstGeom prst="straightConnector1">
-            <a:avLst/>
-          </a:prstGeom>
-          <a:noFill/>
-          <a:ln w="9525" cap="flat" cmpd="sng">
-            <a:solidFill>
-              <a:schemeClr val="lt1"/>
-            </a:solidFill>
-            <a:prstDash val="solid"/>
-            <a:round/>
-            <a:headEnd type="none" w="sm" len="sm"/>
-            <a:tailEnd type="none" w="sm" len="sm"/>
-          </a:ln>
-        </p:spPr>
-      </p:cxnSp>
-      <p:sp>
-        <p:nvSpPr>
-          <p:cNvPr id="288" name="Google Shape;288;p12"/>
-          <p:cNvSpPr/>
-          <p:nvPr/>
-        </p:nvSpPr>
-        <p:spPr>
-          <a:xfrm>
-            <a:off x="837497" y="2312063"/>
-            <a:ext cx="2691410" cy="519373"/>
-          </a:xfrm>
-          <a:prstGeom prst="rect">
-            <a:avLst/>
-          </a:prstGeom>
-          <a:noFill/>
-          <a:ln>
-            <a:noFill/>
-          </a:ln>
-        </p:spPr>
-        <p:txBody>
-          <a:bodyPr spcFirstLastPara="1" wrap="square" lIns="0" tIns="0" rIns="0" bIns="0" anchor="ctr" anchorCtr="0">
-            <a:spAutoFit/>
-          </a:bodyPr>
-          <a:lstStyle/>
-          <a:p>
-            <a:pPr marL="0" marR="0" lvl="0" indent="0" algn="ctr" rtl="0">
-              <a:lnSpc>
-                <a:spcPct val="100000"/>
-              </a:lnSpc>
-              <a:spcBef>
-                <a:spcPts val="0"/>
-              </a:spcBef>
-              <a:spcAft>
-                <a:spcPts val="0"/>
-              </a:spcAft>
-              <a:buClr>
-                <a:srgbClr val="FFFFFF"/>
-              </a:buClr>
-              <a:buSzPts val="3375"/>
-              <a:buFont typeface="Montserrat"/>
-              <a:buNone/>
-            </a:pPr>
-            <a:r>
-              <a:rPr lang="en-US" sz="3375" b="1" i="0" u="none" strike="noStrike" cap="none">
-                <a:solidFill>
-                  <a:srgbClr val="FFFFFF"/>
-                </a:solidFill>
-                <a:latin typeface="Montserrat"/>
-                <a:ea typeface="Montserrat"/>
-                <a:cs typeface="Montserrat"/>
-                <a:sym typeface="Montserrat"/>
-              </a:rPr>
-              <a:t>Agente NFe</a:t>
-            </a:r>
-            <a:endParaRPr sz="3375" b="0" i="0" u="none" strike="noStrike" cap="none">
-              <a:solidFill>
-                <a:schemeClr val="dk1"/>
-              </a:solidFill>
-              <a:latin typeface="Calibri"/>
-              <a:ea typeface="Calibri"/>
-              <a:cs typeface="Calibri"/>
-              <a:sym typeface="Calibri"/>
-            </a:endParaRPr>
-          </a:p>
-        </p:txBody>
-      </p:sp>
-    </p:spTree>
-  </p:cSld>
-  <p:clrMapOvr>
-    <a:masterClrMapping/>
-  </p:clrMapOvr>
-</p:sld>
-</file>
-
 <file path=ppt/slides/slide2.xml><?xml version="1.0" encoding="utf-8"?>
 <p:sld xmlns:a="http://schemas.openxmlformats.org/drawingml/2006/main" xmlns:r="http://schemas.openxmlformats.org/officeDocument/2006/relationships" xmlns:p="http://schemas.openxmlformats.org/presentationml/2006/main">
   <p:cSld>
@@ -16770,9 +16191,17 @@
 <file path=ppt/slides/slide9.xml><?xml version="1.0" encoding="utf-8"?>
 <p:sld xmlns:a="http://schemas.openxmlformats.org/drawingml/2006/main" xmlns:r="http://schemas.openxmlformats.org/officeDocument/2006/relationships" xmlns:p="http://schemas.openxmlformats.org/presentationml/2006/main">
   <p:cSld>
+    <p:bg>
+      <p:bgPr>
+        <a:solidFill>
+          <a:srgbClr val="073763"/>
+        </a:solidFill>
+        <a:effectLst/>
+      </p:bgPr>
+    </p:bg>
     <p:spTree>
       <p:nvGrpSpPr>
-        <p:cNvPr id="1" name="Shape 266"/>
+        <p:cNvPr id="1" name="Shape 284"/>
         <p:cNvGrpSpPr/>
         <p:nvPr/>
       </p:nvGrpSpPr>
@@ -16786,14 +16215,14 @@
       </p:grpSpPr>
       <p:sp>
         <p:nvSpPr>
-          <p:cNvPr id="267" name="Google Shape;267;p10"/>
-          <p:cNvSpPr/>
-          <p:nvPr/>
-        </p:nvSpPr>
-        <p:spPr>
-          <a:xfrm>
-            <a:off x="1545458" y="226937"/>
-            <a:ext cx="6053084" cy="415498"/>
+          <p:cNvPr id="285" name="Google Shape;285;p12"/>
+          <p:cNvSpPr/>
+          <p:nvPr/>
+        </p:nvSpPr>
+        <p:spPr>
+          <a:xfrm>
+            <a:off x="5248255" y="1220459"/>
+            <a:ext cx="2912776" cy="184666"/>
           </a:xfrm>
           <a:prstGeom prst="rect">
             <a:avLst/>
@@ -16809,7 +16238,7 @@
           </a:bodyPr>
           <a:lstStyle/>
           <a:p>
-            <a:pPr marL="0" marR="0" lvl="0" indent="0" algn="ctr" rtl="0">
+            <a:pPr marL="0" marR="0" lvl="0" indent="0" algn="l" rtl="0">
               <a:lnSpc>
                 <a:spcPct val="100000"/>
               </a:lnSpc>
@@ -16827,155 +16256,298 @@
               <a:buNone/>
             </a:pPr>
             <a:r>
-              <a:rPr lang="en-US" sz="2700" b="1" i="0" u="none" strike="noStrike" cap="none">
+              <a:rPr lang="en-US" sz="1200" b="1" i="0" u="none" strike="noStrike" cap="none">
                 <a:solidFill>
-                  <a:srgbClr val="1A365D"/>
+                  <a:schemeClr val="lt1"/>
                 </a:solidFill>
                 <a:latin typeface="Montserrat"/>
                 <a:ea typeface="Montserrat"/>
                 <a:cs typeface="Montserrat"/>
                 <a:sym typeface="Montserrat"/>
               </a:rPr>
-              <a:t>Interface </a:t>
+              <a:t>Integrantes do grupo:</a:t>
             </a:r>
+            <a:endParaRPr sz="1200" b="0" i="0" u="none" strike="noStrike" cap="none">
+              <a:solidFill>
+                <a:schemeClr val="lt1"/>
+              </a:solidFill>
+              <a:latin typeface="Calibri"/>
+              <a:ea typeface="Calibri"/>
+              <a:cs typeface="Calibri"/>
+              <a:sym typeface="Calibri"/>
+            </a:endParaRPr>
+          </a:p>
+        </p:txBody>
+      </p:sp>
+      <p:sp>
+        <p:nvSpPr>
+          <p:cNvPr id="286" name="Google Shape;286;p12"/>
+          <p:cNvSpPr/>
+          <p:nvPr/>
+        </p:nvSpPr>
+        <p:spPr>
+          <a:xfrm>
+            <a:off x="5248255" y="2155094"/>
+            <a:ext cx="3058248" cy="1523494"/>
+          </a:xfrm>
+          <a:prstGeom prst="rect">
+            <a:avLst/>
+          </a:prstGeom>
+          <a:noFill/>
+          <a:ln>
+            <a:noFill/>
+          </a:ln>
+        </p:spPr>
+        <p:txBody>
+          <a:bodyPr spcFirstLastPara="1" wrap="square" lIns="0" tIns="0" rIns="0" bIns="0" anchor="ctr" anchorCtr="0">
+            <a:spAutoFit/>
+          </a:bodyPr>
+          <a:lstStyle/>
+          <a:p>
+            <a:pPr marL="0" marR="0" lvl="0" indent="0" algn="l" rtl="0">
+              <a:lnSpc>
+                <a:spcPct val="150000"/>
+              </a:lnSpc>
+              <a:spcBef>
+                <a:spcPts val="0"/>
+              </a:spcBef>
+              <a:spcAft>
+                <a:spcPts val="0"/>
+              </a:spcAft>
+              <a:buNone/>
+            </a:pPr>
             <a:r>
-              <a:rPr lang="en-US" sz="2700" b="1" i="0" u="none" strike="noStrike" cap="none">
+              <a:rPr lang="en-US" sz="1100" b="0" i="0" u="none" strike="noStrike" cap="none">
                 <a:solidFill>
-                  <a:srgbClr val="27AE60"/>
+                  <a:schemeClr val="lt1"/>
                 </a:solidFill>
                 <a:latin typeface="Montserrat"/>
                 <a:ea typeface="Montserrat"/>
                 <a:cs typeface="Montserrat"/>
                 <a:sym typeface="Montserrat"/>
               </a:rPr>
-              <a:t>para envio e consulta</a:t>
+              <a:t>Antonio João Nascimento Dantas</a:t>
             </a:r>
-            <a:endParaRPr sz="2700" b="0" i="0" u="none" strike="noStrike" cap="none">
-              <a:solidFill>
-                <a:srgbClr val="27AE60"/>
-              </a:solidFill>
-              <a:latin typeface="Calibri"/>
-              <a:ea typeface="Calibri"/>
-              <a:cs typeface="Calibri"/>
-              <a:sym typeface="Calibri"/>
-            </a:endParaRPr>
-          </a:p>
-        </p:txBody>
-      </p:sp>
-      <p:sp>
-        <p:nvSpPr>
-          <p:cNvPr id="268" name="Google Shape;268;p10"/>
-          <p:cNvSpPr/>
-          <p:nvPr/>
-        </p:nvSpPr>
-        <p:spPr>
-          <a:xfrm>
-            <a:off x="1677667" y="945335"/>
-            <a:ext cx="1098568" cy="519373"/>
-          </a:xfrm>
-          <a:prstGeom prst="rect">
-            <a:avLst/>
-          </a:prstGeom>
-          <a:noFill/>
-          <a:ln>
-            <a:noFill/>
-          </a:ln>
-        </p:spPr>
-        <p:txBody>
-          <a:bodyPr spcFirstLastPara="1" wrap="square" lIns="0" tIns="0" rIns="0" bIns="0" anchor="ctr" anchorCtr="0">
-            <a:spAutoFit/>
-          </a:bodyPr>
-          <a:lstStyle/>
-          <a:p>
-            <a:pPr marL="0" marR="0" lvl="0" indent="0" algn="r" rtl="0">
-              <a:lnSpc>
-                <a:spcPct val="100000"/>
-              </a:lnSpc>
-              <a:spcBef>
-                <a:spcPts val="0"/>
-              </a:spcBef>
-              <a:spcAft>
-                <a:spcPts val="0"/>
-              </a:spcAft>
-              <a:buClr>
-                <a:srgbClr val="1A365D"/>
-              </a:buClr>
-              <a:buSzPts val="1125"/>
-              <a:buFont typeface="Montserrat"/>
+            <a:endParaRPr/>
+          </a:p>
+          <a:p>
+            <a:pPr marL="0" marR="0" lvl="0" indent="0" algn="l" rtl="0">
+              <a:lnSpc>
+                <a:spcPct val="150000"/>
+              </a:lnSpc>
+              <a:spcBef>
+                <a:spcPts val="0"/>
+              </a:spcBef>
+              <a:spcAft>
+                <a:spcPts val="0"/>
+              </a:spcAft>
               <a:buNone/>
             </a:pPr>
             <a:r>
-              <a:rPr lang="en-US" sz="1125" b="0" i="0" u="none" strike="noStrike" cap="none" dirty="0" err="1">
+              <a:rPr lang="en-US" sz="1100" b="0" i="0" u="none" strike="noStrike" cap="none">
                 <a:solidFill>
-                  <a:srgbClr val="1A365D"/>
+                  <a:schemeClr val="lt1"/>
                 </a:solidFill>
                 <a:latin typeface="Montserrat"/>
                 <a:ea typeface="Montserrat"/>
                 <a:cs typeface="Montserrat"/>
                 <a:sym typeface="Montserrat"/>
               </a:rPr>
-              <a:t>Exemplo</a:t>
+              <a:t>Daniel Correa Rodrigues</a:t>
             </a:r>
+            <a:endParaRPr/>
+          </a:p>
+          <a:p>
+            <a:pPr marL="0" marR="0" lvl="0" indent="0" algn="l" rtl="0">
+              <a:lnSpc>
+                <a:spcPct val="150000"/>
+              </a:lnSpc>
+              <a:spcBef>
+                <a:spcPts val="0"/>
+              </a:spcBef>
+              <a:spcAft>
+                <a:spcPts val="0"/>
+              </a:spcAft>
+              <a:buNone/>
+            </a:pPr>
             <a:r>
-              <a:rPr lang="en-US" sz="1125" b="0" i="0" u="none" strike="noStrike" cap="none" dirty="0">
+              <a:rPr lang="en-US" sz="1100" b="0" i="0" u="none" strike="noStrike" cap="none">
                 <a:solidFill>
-                  <a:srgbClr val="1A365D"/>
+                  <a:schemeClr val="lt1"/>
                 </a:solidFill>
                 <a:latin typeface="Montserrat"/>
                 <a:ea typeface="Montserrat"/>
                 <a:cs typeface="Montserrat"/>
                 <a:sym typeface="Montserrat"/>
               </a:rPr>
-              <a:t>:</a:t>
+              <a:t>Eduarda Silveira Cardoso</a:t>
             </a:r>
-            <a:br>
-              <a:rPr lang="en-US" sz="1125" b="0" i="0" u="none" strike="noStrike" cap="none" dirty="0">
+            <a:endParaRPr/>
+          </a:p>
+          <a:p>
+            <a:pPr marL="0" marR="0" lvl="0" indent="0" algn="l" rtl="0">
+              <a:lnSpc>
+                <a:spcPct val="150000"/>
+              </a:lnSpc>
+              <a:spcBef>
+                <a:spcPts val="0"/>
+              </a:spcBef>
+              <a:spcAft>
+                <a:spcPts val="0"/>
+              </a:spcAft>
+              <a:buNone/>
+            </a:pPr>
+            <a:r>
+              <a:rPr lang="en-US" sz="1100" b="0" i="0" u="none" strike="noStrike" cap="none">
                 <a:solidFill>
-                  <a:srgbClr val="1A365D"/>
+                  <a:schemeClr val="lt1"/>
                 </a:solidFill>
                 <a:latin typeface="Montserrat"/>
                 <a:ea typeface="Montserrat"/>
                 <a:cs typeface="Montserrat"/>
                 <a:sym typeface="Montserrat"/>
               </a:rPr>
-            </a:br>
+              <a:t>Lorrane da F C Santos Santana</a:t>
+            </a:r>
+            <a:endParaRPr/>
+          </a:p>
+          <a:p>
+            <a:pPr marL="0" marR="0" lvl="0" indent="0" algn="l" rtl="0">
+              <a:lnSpc>
+                <a:spcPct val="150000"/>
+              </a:lnSpc>
+              <a:spcBef>
+                <a:spcPts val="0"/>
+              </a:spcBef>
+              <a:spcAft>
+                <a:spcPts val="0"/>
+              </a:spcAft>
+              <a:buNone/>
+            </a:pPr>
             <a:r>
-              <a:rPr lang="en-US" sz="1125" b="1" i="0" u="none" strike="noStrike" cap="none" dirty="0">
+              <a:rPr lang="en-US" sz="1100" b="0" i="0" u="none" strike="noStrike" cap="none">
                 <a:solidFill>
-                  <a:srgbClr val="1A365D"/>
+                  <a:schemeClr val="lt1"/>
                 </a:solidFill>
                 <a:latin typeface="Montserrat"/>
                 <a:ea typeface="Montserrat"/>
                 <a:cs typeface="Montserrat"/>
                 <a:sym typeface="Montserrat"/>
               </a:rPr>
-              <a:t>carga de NF-e </a:t>
+              <a:t>Luciane Schumacher</a:t>
             </a:r>
+            <a:endParaRPr/>
+          </a:p>
+          <a:p>
+            <a:pPr marL="0" marR="0" lvl="0" indent="0" algn="l" rtl="0">
+              <a:lnSpc>
+                <a:spcPct val="150000"/>
+              </a:lnSpc>
+              <a:spcBef>
+                <a:spcPts val="0"/>
+              </a:spcBef>
+              <a:spcAft>
+                <a:spcPts val="0"/>
+              </a:spcAft>
+              <a:buNone/>
+            </a:pPr>
             <a:r>
-              <a:rPr lang="en-US" sz="1125" b="1" i="0" u="none" strike="noStrike" cap="none" dirty="0" err="1">
+              <a:rPr lang="en-US" sz="1100" b="0" i="0" u="none" strike="noStrike" cap="none">
                 <a:solidFill>
-                  <a:srgbClr val="1A365D"/>
+                  <a:schemeClr val="lt1"/>
                 </a:solidFill>
                 <a:latin typeface="Montserrat"/>
                 <a:ea typeface="Montserrat"/>
                 <a:cs typeface="Montserrat"/>
                 <a:sym typeface="Montserrat"/>
               </a:rPr>
-              <a:t>em</a:t>
+              <a:t>Valdinei de Souza Camargo</a:t>
             </a:r>
+            <a:endParaRPr/>
+          </a:p>
+        </p:txBody>
+      </p:sp>
+      <p:cxnSp>
+        <p:nvCxnSpPr>
+          <p:cNvPr id="287" name="Google Shape;287;p12"/>
+          <p:cNvCxnSpPr/>
+          <p:nvPr/>
+        </p:nvCxnSpPr>
+        <p:spPr>
+          <a:xfrm>
+            <a:off x="4565073" y="1073727"/>
+            <a:ext cx="0" cy="3228109"/>
+          </a:xfrm>
+          <a:prstGeom prst="straightConnector1">
+            <a:avLst/>
+          </a:prstGeom>
+          <a:noFill/>
+          <a:ln w="9525" cap="flat" cmpd="sng">
+            <a:solidFill>
+              <a:schemeClr val="lt1"/>
+            </a:solidFill>
+            <a:prstDash val="solid"/>
+            <a:round/>
+            <a:headEnd type="none" w="sm" len="sm"/>
+            <a:tailEnd type="none" w="sm" len="sm"/>
+          </a:ln>
+        </p:spPr>
+      </p:cxnSp>
+      <p:sp>
+        <p:nvSpPr>
+          <p:cNvPr id="288" name="Google Shape;288;p12"/>
+          <p:cNvSpPr/>
+          <p:nvPr/>
+        </p:nvSpPr>
+        <p:spPr>
+          <a:xfrm>
+            <a:off x="837497" y="2312063"/>
+            <a:ext cx="2691410" cy="519373"/>
+          </a:xfrm>
+          <a:prstGeom prst="rect">
+            <a:avLst/>
+          </a:prstGeom>
+          <a:noFill/>
+          <a:ln>
+            <a:noFill/>
+          </a:ln>
+        </p:spPr>
+        <p:txBody>
+          <a:bodyPr spcFirstLastPara="1" wrap="square" lIns="0" tIns="0" rIns="0" bIns="0" anchor="ctr" anchorCtr="0">
+            <a:spAutoFit/>
+          </a:bodyPr>
+          <a:lstStyle/>
+          <a:p>
+            <a:pPr marL="0" marR="0" lvl="0" indent="0" algn="ctr" rtl="0">
+              <a:lnSpc>
+                <a:spcPct val="100000"/>
+              </a:lnSpc>
+              <a:spcBef>
+                <a:spcPts val="0"/>
+              </a:spcBef>
+              <a:spcAft>
+                <a:spcPts val="0"/>
+              </a:spcAft>
+              <a:buClr>
+                <a:srgbClr val="FFFFFF"/>
+              </a:buClr>
+              <a:buSzPts val="3375"/>
+              <a:buFont typeface="Montserrat"/>
+              <a:buNone/>
+            </a:pPr>
             <a:r>
-              <a:rPr lang="en-US" sz="1125" b="1" i="0" u="none" strike="noStrike" cap="none" dirty="0">
+              <a:rPr lang="en-US" sz="3375" b="1" i="0" u="none" strike="noStrike" cap="none">
                 <a:solidFill>
-                  <a:srgbClr val="1A365D"/>
+                  <a:srgbClr val="FFFFFF"/>
                 </a:solidFill>
                 <a:latin typeface="Montserrat"/>
                 <a:ea typeface="Montserrat"/>
                 <a:cs typeface="Montserrat"/>
                 <a:sym typeface="Montserrat"/>
               </a:rPr>
-              <a:t> XML</a:t>
+              <a:t>Agente NFe</a:t>
             </a:r>
-            <a:endParaRPr sz="1125" b="0" i="0" u="none" strike="noStrike" cap="none" dirty="0">
+            <a:endParaRPr sz="3375" b="0" i="0" u="none" strike="noStrike" cap="none">
               <a:solidFill>
                 <a:schemeClr val="dk1"/>
               </a:solidFill>
@@ -16987,138 +16559,7 @@
           </a:p>
         </p:txBody>
       </p:sp>
-      <p:sp>
-        <p:nvSpPr>
-          <p:cNvPr id="269" name="Google Shape;269;p10"/>
-          <p:cNvSpPr/>
-          <p:nvPr/>
-        </p:nvSpPr>
-        <p:spPr>
-          <a:xfrm>
-            <a:off x="6339073" y="945335"/>
-            <a:ext cx="1186695" cy="1211870"/>
-          </a:xfrm>
-          <a:prstGeom prst="rect">
-            <a:avLst/>
-          </a:prstGeom>
-          <a:noFill/>
-          <a:ln>
-            <a:noFill/>
-          </a:ln>
-        </p:spPr>
-        <p:txBody>
-          <a:bodyPr spcFirstLastPara="1" wrap="square" lIns="0" tIns="0" rIns="0" bIns="0" anchor="ctr" anchorCtr="0">
-            <a:spAutoFit/>
-          </a:bodyPr>
-          <a:lstStyle/>
-          <a:p>
-            <a:pPr marL="0" marR="0" lvl="0" indent="0" algn="l" rtl="0">
-              <a:lnSpc>
-                <a:spcPct val="100000"/>
-              </a:lnSpc>
-              <a:spcBef>
-                <a:spcPts val="0"/>
-              </a:spcBef>
-              <a:spcAft>
-                <a:spcPts val="0"/>
-              </a:spcAft>
-              <a:buClr>
-                <a:srgbClr val="1A365D"/>
-              </a:buClr>
-              <a:buSzPts val="1125"/>
-              <a:buFont typeface="Montserrat"/>
-              <a:buNone/>
-            </a:pPr>
-            <a:r>
-              <a:rPr lang="en-US" sz="1125" b="0" i="0" u="none" strike="noStrike" cap="none" dirty="0" err="1">
-                <a:solidFill>
-                  <a:srgbClr val="1A365D"/>
-                </a:solidFill>
-                <a:latin typeface="Montserrat"/>
-                <a:ea typeface="Montserrat"/>
-                <a:cs typeface="Montserrat"/>
-                <a:sym typeface="Montserrat"/>
-              </a:rPr>
-              <a:t>Pergunta</a:t>
-            </a:r>
-            <a:r>
-              <a:rPr lang="en-US" sz="1125" b="0" i="0" u="none" strike="noStrike" cap="none" dirty="0">
-                <a:solidFill>
-                  <a:srgbClr val="1A365D"/>
-                </a:solidFill>
-                <a:latin typeface="Montserrat"/>
-                <a:ea typeface="Montserrat"/>
-                <a:cs typeface="Montserrat"/>
-                <a:sym typeface="Montserrat"/>
-              </a:rPr>
-              <a:t>:</a:t>
-            </a:r>
-            <a:br>
-              <a:rPr lang="en-US" sz="1125" b="1" i="0" u="none" strike="noStrike" cap="none" dirty="0">
-                <a:solidFill>
-                  <a:srgbClr val="1A365D"/>
-                </a:solidFill>
-                <a:latin typeface="Montserrat"/>
-                <a:ea typeface="Montserrat"/>
-                <a:cs typeface="Montserrat"/>
-                <a:sym typeface="Montserrat"/>
-              </a:rPr>
-            </a:br>
-            <a:r>
-              <a:rPr lang="pt-BR" sz="1125" b="1" dirty="0">
-                <a:solidFill>
-                  <a:srgbClr val="1A365D"/>
-                </a:solidFill>
-                <a:latin typeface="Montserrat"/>
-              </a:rPr>
-              <a:t>O documento possui o Protocolo de Autorização de Uso emitido pela Sefaz ?</a:t>
-            </a:r>
-            <a:endParaRPr sz="1125" b="1" dirty="0">
-              <a:solidFill>
-                <a:srgbClr val="1A365D"/>
-              </a:solidFill>
-              <a:latin typeface="Montserrat"/>
-              <a:sym typeface="Calibri"/>
-            </a:endParaRPr>
-          </a:p>
-        </p:txBody>
-      </p:sp>
-      <p:pic>
-        <p:nvPicPr>
-          <p:cNvPr id="4" name="Imagem 3">
-            <a:extLst>
-              <a:ext uri="{FF2B5EF4-FFF2-40B4-BE49-F238E27FC236}">
-                <a16:creationId xmlns:a16="http://schemas.microsoft.com/office/drawing/2014/main" id="{47EC033B-5EB4-4B5F-BA5C-431EB1DABAD4}"/>
-              </a:ext>
-            </a:extLst>
-          </p:cNvPr>
-          <p:cNvPicPr>
-            <a:picLocks noChangeAspect="1"/>
-          </p:cNvPicPr>
-          <p:nvPr/>
-        </p:nvPicPr>
-        <p:blipFill>
-          <a:blip r:embed="rId3"/>
-          <a:stretch>
-            <a:fillRect/>
-          </a:stretch>
-        </p:blipFill>
-        <p:spPr>
-          <a:xfrm>
-            <a:off x="2965607" y="880532"/>
-            <a:ext cx="3212786" cy="3014135"/>
-          </a:xfrm>
-          <a:prstGeom prst="rect">
-            <a:avLst/>
-          </a:prstGeom>
-        </p:spPr>
-      </p:pic>
     </p:spTree>
-    <p:extLst>
-      <p:ext uri="{BB962C8B-B14F-4D97-AF65-F5344CB8AC3E}">
-        <p14:creationId xmlns:p14="http://schemas.microsoft.com/office/powerpoint/2010/main" val="3141520723"/>
-      </p:ext>
-    </p:extLst>
   </p:cSld>
   <p:clrMapOvr>
     <a:masterClrMapping/>
